--- a/GlowCosmetic Wabsite React MCA CIE-2.pptx
+++ b/GlowCosmetic Wabsite React MCA CIE-2.pptx
@@ -5,7 +5,7 @@
     <p:sldMasterId id="2147483659" r:id="rId1"/>
   </p:sldMasterIdLst>
   <p:notesMasterIdLst>
-    <p:notesMasterId r:id="rId23"/>
+    <p:notesMasterId r:id="rId27"/>
   </p:notesMasterIdLst>
   <p:sldIdLst>
     <p:sldId id="256" r:id="rId2"/>
@@ -26,28 +26,32 @@
     <p:sldId id="277" r:id="rId17"/>
     <p:sldId id="280" r:id="rId18"/>
     <p:sldId id="281" r:id="rId19"/>
-    <p:sldId id="262" r:id="rId20"/>
-    <p:sldId id="278" r:id="rId21"/>
-    <p:sldId id="279" r:id="rId22"/>
+    <p:sldId id="282" r:id="rId20"/>
+    <p:sldId id="286" r:id="rId21"/>
+    <p:sldId id="283" r:id="rId22"/>
+    <p:sldId id="284" r:id="rId23"/>
+    <p:sldId id="262" r:id="rId24"/>
+    <p:sldId id="278" r:id="rId25"/>
+    <p:sldId id="279" r:id="rId26"/>
   </p:sldIdLst>
   <p:sldSz cx="9144000" cy="5143500" type="screen16x9"/>
   <p:notesSz cx="6858000" cy="9144000"/>
   <p:embeddedFontLst>
     <p:embeddedFont>
-      <p:font typeface="Century Gothic Paneuropean Bold" panose="020B0604020202020204" charset="0"/>
-      <p:regular r:id="rId24"/>
+      <p:font typeface="Nunito" panose="020B0604020202020204" charset="0"/>
+      <p:regular r:id="rId28"/>
+      <p:bold r:id="rId29"/>
+      <p:italic r:id="rId30"/>
+      <p:boldItalic r:id="rId31"/>
     </p:embeddedFont>
     <p:embeddedFont>
       <p:font typeface="Maven Pro" panose="020B0604020202020204" charset="0"/>
-      <p:regular r:id="rId25"/>
-      <p:bold r:id="rId26"/>
+      <p:regular r:id="rId32"/>
+      <p:bold r:id="rId33"/>
     </p:embeddedFont>
     <p:embeddedFont>
-      <p:font typeface="Nunito" panose="020B0604020202020204" charset="0"/>
-      <p:regular r:id="rId27"/>
-      <p:bold r:id="rId28"/>
-      <p:italic r:id="rId29"/>
-      <p:boldItalic r:id="rId30"/>
+      <p:font typeface="Century Gothic Paneuropean Bold" panose="020B0604020202020204" charset="0"/>
+      <p:regular r:id="rId34"/>
     </p:embeddedFont>
   </p:embeddedFontLst>
   <p:defaultTextStyle>
@@ -1606,7 +1610,7 @@
   <p:cSld>
     <p:spTree>
       <p:nvGrpSpPr>
-        <p:cNvPr id="1" name="Shape 311"/>
+        <p:cNvPr id="1" name="Shape 306"/>
         <p:cNvGrpSpPr/>
         <p:nvPr/>
       </p:nvGrpSpPr>
@@ -1620,7 +1624,7 @@
       </p:grpSpPr>
       <p:sp>
         <p:nvSpPr>
-          <p:cNvPr id="312" name="Google Shape;312;gc6f980f91_0_37:notes"/>
+          <p:cNvPr id="307" name="Google Shape;307;gc6f980f91_0_33:notes"/>
           <p:cNvSpPr>
             <a:spLocks noGrp="1" noRot="1" noChangeAspect="1"/>
           </p:cNvSpPr>
@@ -1661,7 +1665,7 @@
       </p:sp>
       <p:sp>
         <p:nvSpPr>
-          <p:cNvPr id="313" name="Google Shape;313;gc6f980f91_0_37:notes"/>
+          <p:cNvPr id="308" name="Google Shape;308;gc6f980f91_0_33:notes"/>
           <p:cNvSpPr txBox="1">
             <a:spLocks noGrp="1"/>
           </p:cNvSpPr>
@@ -1698,6 +1702,229 @@
         </p:txBody>
       </p:sp>
     </p:spTree>
+    <p:extLst>
+      <p:ext uri="{BB962C8B-B14F-4D97-AF65-F5344CB8AC3E}">
+        <p14:creationId xmlns:p14="http://schemas.microsoft.com/office/powerpoint/2010/main" val="1368881867"/>
+      </p:ext>
+    </p:extLst>
+  </p:cSld>
+  <p:clrMapOvr>
+    <a:masterClrMapping/>
+  </p:clrMapOvr>
+</p:notes>
+</file>
+
+<file path=ppt/notesSlides/notesSlide18.xml><?xml version="1.0" encoding="utf-8"?>
+<p:notes xmlns:a="http://schemas.openxmlformats.org/drawingml/2006/main" xmlns:r="http://schemas.openxmlformats.org/officeDocument/2006/relationships" xmlns:p="http://schemas.openxmlformats.org/presentationml/2006/main" showMasterSp="0" showMasterPhAnim="0">
+  <p:cSld>
+    <p:spTree>
+      <p:nvGrpSpPr>
+        <p:cNvPr id="1" name="Shape 306"/>
+        <p:cNvGrpSpPr/>
+        <p:nvPr/>
+      </p:nvGrpSpPr>
+      <p:grpSpPr>
+        <a:xfrm>
+          <a:off x="0" y="0"/>
+          <a:ext cx="0" cy="0"/>
+          <a:chOff x="0" y="0"/>
+          <a:chExt cx="0" cy="0"/>
+        </a:xfrm>
+      </p:grpSpPr>
+      <p:sp>
+        <p:nvSpPr>
+          <p:cNvPr id="307" name="Google Shape;307;gc6f980f91_0_33:notes"/>
+          <p:cNvSpPr>
+            <a:spLocks noGrp="1" noRot="1" noChangeAspect="1"/>
+          </p:cNvSpPr>
+          <p:nvPr>
+            <p:ph type="sldImg" idx="2"/>
+          </p:nvPr>
+        </p:nvSpPr>
+        <p:spPr>
+          <a:xfrm>
+            <a:off x="381000" y="685800"/>
+            <a:ext cx="6096000" cy="3429000"/>
+          </a:xfrm>
+          <a:custGeom>
+            <a:avLst/>
+            <a:gdLst/>
+            <a:ahLst/>
+            <a:cxnLst/>
+            <a:rect l="l" t="t" r="r" b="b"/>
+            <a:pathLst>
+              <a:path w="120000" h="120000" extrusionOk="0">
+                <a:moveTo>
+                  <a:pt x="0" y="0"/>
+                </a:moveTo>
+                <a:lnTo>
+                  <a:pt x="120000" y="0"/>
+                </a:lnTo>
+                <a:lnTo>
+                  <a:pt x="120000" y="120000"/>
+                </a:lnTo>
+                <a:lnTo>
+                  <a:pt x="0" y="120000"/>
+                </a:lnTo>
+                <a:close/>
+              </a:path>
+            </a:pathLst>
+          </a:custGeom>
+        </p:spPr>
+      </p:sp>
+      <p:sp>
+        <p:nvSpPr>
+          <p:cNvPr id="308" name="Google Shape;308;gc6f980f91_0_33:notes"/>
+          <p:cNvSpPr txBox="1">
+            <a:spLocks noGrp="1"/>
+          </p:cNvSpPr>
+          <p:nvPr>
+            <p:ph type="body" idx="1"/>
+          </p:nvPr>
+        </p:nvSpPr>
+        <p:spPr>
+          <a:xfrm>
+            <a:off x="685800" y="4343400"/>
+            <a:ext cx="5486400" cy="4114800"/>
+          </a:xfrm>
+          <a:prstGeom prst="rect">
+            <a:avLst/>
+          </a:prstGeom>
+        </p:spPr>
+        <p:txBody>
+          <a:bodyPr spcFirstLastPara="1" wrap="square" lIns="91425" tIns="91425" rIns="91425" bIns="91425" anchor="t" anchorCtr="0">
+            <a:noAutofit/>
+          </a:bodyPr>
+          <a:lstStyle/>
+          <a:p>
+            <a:pPr marL="0" lvl="0" indent="0" algn="l" rtl="0">
+              <a:spcBef>
+                <a:spcPts val="0"/>
+              </a:spcBef>
+              <a:spcAft>
+                <a:spcPts val="0"/>
+              </a:spcAft>
+              <a:buNone/>
+            </a:pPr>
+            <a:endParaRPr/>
+          </a:p>
+        </p:txBody>
+      </p:sp>
+    </p:spTree>
+    <p:extLst>
+      <p:ext uri="{BB962C8B-B14F-4D97-AF65-F5344CB8AC3E}">
+        <p14:creationId xmlns:p14="http://schemas.microsoft.com/office/powerpoint/2010/main" val="2554835188"/>
+      </p:ext>
+    </p:extLst>
+  </p:cSld>
+  <p:clrMapOvr>
+    <a:masterClrMapping/>
+  </p:clrMapOvr>
+</p:notes>
+</file>
+
+<file path=ppt/notesSlides/notesSlide19.xml><?xml version="1.0" encoding="utf-8"?>
+<p:notes xmlns:a="http://schemas.openxmlformats.org/drawingml/2006/main" xmlns:r="http://schemas.openxmlformats.org/officeDocument/2006/relationships" xmlns:p="http://schemas.openxmlformats.org/presentationml/2006/main" showMasterSp="0" showMasterPhAnim="0">
+  <p:cSld>
+    <p:spTree>
+      <p:nvGrpSpPr>
+        <p:cNvPr id="1" name="Shape 306"/>
+        <p:cNvGrpSpPr/>
+        <p:nvPr/>
+      </p:nvGrpSpPr>
+      <p:grpSpPr>
+        <a:xfrm>
+          <a:off x="0" y="0"/>
+          <a:ext cx="0" cy="0"/>
+          <a:chOff x="0" y="0"/>
+          <a:chExt cx="0" cy="0"/>
+        </a:xfrm>
+      </p:grpSpPr>
+      <p:sp>
+        <p:nvSpPr>
+          <p:cNvPr id="307" name="Google Shape;307;gc6f980f91_0_33:notes"/>
+          <p:cNvSpPr>
+            <a:spLocks noGrp="1" noRot="1" noChangeAspect="1"/>
+          </p:cNvSpPr>
+          <p:nvPr>
+            <p:ph type="sldImg" idx="2"/>
+          </p:nvPr>
+        </p:nvSpPr>
+        <p:spPr>
+          <a:xfrm>
+            <a:off x="381000" y="685800"/>
+            <a:ext cx="6096000" cy="3429000"/>
+          </a:xfrm>
+          <a:custGeom>
+            <a:avLst/>
+            <a:gdLst/>
+            <a:ahLst/>
+            <a:cxnLst/>
+            <a:rect l="l" t="t" r="r" b="b"/>
+            <a:pathLst>
+              <a:path w="120000" h="120000" extrusionOk="0">
+                <a:moveTo>
+                  <a:pt x="0" y="0"/>
+                </a:moveTo>
+                <a:lnTo>
+                  <a:pt x="120000" y="0"/>
+                </a:lnTo>
+                <a:lnTo>
+                  <a:pt x="120000" y="120000"/>
+                </a:lnTo>
+                <a:lnTo>
+                  <a:pt x="0" y="120000"/>
+                </a:lnTo>
+                <a:close/>
+              </a:path>
+            </a:pathLst>
+          </a:custGeom>
+        </p:spPr>
+      </p:sp>
+      <p:sp>
+        <p:nvSpPr>
+          <p:cNvPr id="308" name="Google Shape;308;gc6f980f91_0_33:notes"/>
+          <p:cNvSpPr txBox="1">
+            <a:spLocks noGrp="1"/>
+          </p:cNvSpPr>
+          <p:nvPr>
+            <p:ph type="body" idx="1"/>
+          </p:nvPr>
+        </p:nvSpPr>
+        <p:spPr>
+          <a:xfrm>
+            <a:off x="685800" y="4343400"/>
+            <a:ext cx="5486400" cy="4114800"/>
+          </a:xfrm>
+          <a:prstGeom prst="rect">
+            <a:avLst/>
+          </a:prstGeom>
+        </p:spPr>
+        <p:txBody>
+          <a:bodyPr spcFirstLastPara="1" wrap="square" lIns="91425" tIns="91425" rIns="91425" bIns="91425" anchor="t" anchorCtr="0">
+            <a:noAutofit/>
+          </a:bodyPr>
+          <a:lstStyle/>
+          <a:p>
+            <a:pPr marL="0" lvl="0" indent="0" algn="l" rtl="0">
+              <a:spcBef>
+                <a:spcPts val="0"/>
+              </a:spcBef>
+              <a:spcAft>
+                <a:spcPts val="0"/>
+              </a:spcAft>
+              <a:buNone/>
+            </a:pPr>
+            <a:endParaRPr/>
+          </a:p>
+        </p:txBody>
+      </p:sp>
+    </p:spTree>
+    <p:extLst>
+      <p:ext uri="{BB962C8B-B14F-4D97-AF65-F5344CB8AC3E}">
+        <p14:creationId xmlns:p14="http://schemas.microsoft.com/office/powerpoint/2010/main" val="433649834"/>
+      </p:ext>
+    </p:extLst>
   </p:cSld>
   <p:clrMapOvr>
     <a:masterClrMapping/>
@@ -1766,6 +1993,219 @@
       <p:sp>
         <p:nvSpPr>
           <p:cNvPr id="283" name="Google Shape;283;gc6f980f91_0_5:notes"/>
+          <p:cNvSpPr txBox="1">
+            <a:spLocks noGrp="1"/>
+          </p:cNvSpPr>
+          <p:nvPr>
+            <p:ph type="body" idx="1"/>
+          </p:nvPr>
+        </p:nvSpPr>
+        <p:spPr>
+          <a:xfrm>
+            <a:off x="685800" y="4343400"/>
+            <a:ext cx="5486400" cy="4114800"/>
+          </a:xfrm>
+          <a:prstGeom prst="rect">
+            <a:avLst/>
+          </a:prstGeom>
+        </p:spPr>
+        <p:txBody>
+          <a:bodyPr spcFirstLastPara="1" wrap="square" lIns="91425" tIns="91425" rIns="91425" bIns="91425" anchor="t" anchorCtr="0">
+            <a:noAutofit/>
+          </a:bodyPr>
+          <a:lstStyle/>
+          <a:p>
+            <a:pPr marL="0" lvl="0" indent="0" algn="l" rtl="0">
+              <a:spcBef>
+                <a:spcPts val="0"/>
+              </a:spcBef>
+              <a:spcAft>
+                <a:spcPts val="0"/>
+              </a:spcAft>
+              <a:buNone/>
+            </a:pPr>
+            <a:endParaRPr/>
+          </a:p>
+        </p:txBody>
+      </p:sp>
+    </p:spTree>
+  </p:cSld>
+  <p:clrMapOvr>
+    <a:masterClrMapping/>
+  </p:clrMapOvr>
+</p:notes>
+</file>
+
+<file path=ppt/notesSlides/notesSlide20.xml><?xml version="1.0" encoding="utf-8"?>
+<p:notes xmlns:a="http://schemas.openxmlformats.org/drawingml/2006/main" xmlns:r="http://schemas.openxmlformats.org/officeDocument/2006/relationships" xmlns:p="http://schemas.openxmlformats.org/presentationml/2006/main" showMasterSp="0" showMasterPhAnim="0">
+  <p:cSld>
+    <p:spTree>
+      <p:nvGrpSpPr>
+        <p:cNvPr id="1" name="Shape 306"/>
+        <p:cNvGrpSpPr/>
+        <p:nvPr/>
+      </p:nvGrpSpPr>
+      <p:grpSpPr>
+        <a:xfrm>
+          <a:off x="0" y="0"/>
+          <a:ext cx="0" cy="0"/>
+          <a:chOff x="0" y="0"/>
+          <a:chExt cx="0" cy="0"/>
+        </a:xfrm>
+      </p:grpSpPr>
+      <p:sp>
+        <p:nvSpPr>
+          <p:cNvPr id="307" name="Google Shape;307;gc6f980f91_0_33:notes"/>
+          <p:cNvSpPr>
+            <a:spLocks noGrp="1" noRot="1" noChangeAspect="1"/>
+          </p:cNvSpPr>
+          <p:nvPr>
+            <p:ph type="sldImg" idx="2"/>
+          </p:nvPr>
+        </p:nvSpPr>
+        <p:spPr>
+          <a:xfrm>
+            <a:off x="381000" y="685800"/>
+            <a:ext cx="6096000" cy="3429000"/>
+          </a:xfrm>
+          <a:custGeom>
+            <a:avLst/>
+            <a:gdLst/>
+            <a:ahLst/>
+            <a:cxnLst/>
+            <a:rect l="l" t="t" r="r" b="b"/>
+            <a:pathLst>
+              <a:path w="120000" h="120000" extrusionOk="0">
+                <a:moveTo>
+                  <a:pt x="0" y="0"/>
+                </a:moveTo>
+                <a:lnTo>
+                  <a:pt x="120000" y="0"/>
+                </a:lnTo>
+                <a:lnTo>
+                  <a:pt x="120000" y="120000"/>
+                </a:lnTo>
+                <a:lnTo>
+                  <a:pt x="0" y="120000"/>
+                </a:lnTo>
+                <a:close/>
+              </a:path>
+            </a:pathLst>
+          </a:custGeom>
+        </p:spPr>
+      </p:sp>
+      <p:sp>
+        <p:nvSpPr>
+          <p:cNvPr id="308" name="Google Shape;308;gc6f980f91_0_33:notes"/>
+          <p:cNvSpPr txBox="1">
+            <a:spLocks noGrp="1"/>
+          </p:cNvSpPr>
+          <p:nvPr>
+            <p:ph type="body" idx="1"/>
+          </p:nvPr>
+        </p:nvSpPr>
+        <p:spPr>
+          <a:xfrm>
+            <a:off x="685800" y="4343400"/>
+            <a:ext cx="5486400" cy="4114800"/>
+          </a:xfrm>
+          <a:prstGeom prst="rect">
+            <a:avLst/>
+          </a:prstGeom>
+        </p:spPr>
+        <p:txBody>
+          <a:bodyPr spcFirstLastPara="1" wrap="square" lIns="91425" tIns="91425" rIns="91425" bIns="91425" anchor="t" anchorCtr="0">
+            <a:noAutofit/>
+          </a:bodyPr>
+          <a:lstStyle/>
+          <a:p>
+            <a:pPr marL="0" lvl="0" indent="0" algn="l" rtl="0">
+              <a:spcBef>
+                <a:spcPts val="0"/>
+              </a:spcBef>
+              <a:spcAft>
+                <a:spcPts val="0"/>
+              </a:spcAft>
+              <a:buNone/>
+            </a:pPr>
+            <a:endParaRPr/>
+          </a:p>
+        </p:txBody>
+      </p:sp>
+    </p:spTree>
+    <p:extLst>
+      <p:ext uri="{BB962C8B-B14F-4D97-AF65-F5344CB8AC3E}">
+        <p14:creationId xmlns:p14="http://schemas.microsoft.com/office/powerpoint/2010/main" val="367198159"/>
+      </p:ext>
+    </p:extLst>
+  </p:cSld>
+  <p:clrMapOvr>
+    <a:masterClrMapping/>
+  </p:clrMapOvr>
+</p:notes>
+</file>
+
+<file path=ppt/notesSlides/notesSlide21.xml><?xml version="1.0" encoding="utf-8"?>
+<p:notes xmlns:a="http://schemas.openxmlformats.org/drawingml/2006/main" xmlns:r="http://schemas.openxmlformats.org/officeDocument/2006/relationships" xmlns:p="http://schemas.openxmlformats.org/presentationml/2006/main" showMasterSp="0" showMasterPhAnim="0">
+  <p:cSld>
+    <p:spTree>
+      <p:nvGrpSpPr>
+        <p:cNvPr id="1" name="Shape 311"/>
+        <p:cNvGrpSpPr/>
+        <p:nvPr/>
+      </p:nvGrpSpPr>
+      <p:grpSpPr>
+        <a:xfrm>
+          <a:off x="0" y="0"/>
+          <a:ext cx="0" cy="0"/>
+          <a:chOff x="0" y="0"/>
+          <a:chExt cx="0" cy="0"/>
+        </a:xfrm>
+      </p:grpSpPr>
+      <p:sp>
+        <p:nvSpPr>
+          <p:cNvPr id="312" name="Google Shape;312;gc6f980f91_0_37:notes"/>
+          <p:cNvSpPr>
+            <a:spLocks noGrp="1" noRot="1" noChangeAspect="1"/>
+          </p:cNvSpPr>
+          <p:nvPr>
+            <p:ph type="sldImg" idx="2"/>
+          </p:nvPr>
+        </p:nvSpPr>
+        <p:spPr>
+          <a:xfrm>
+            <a:off x="381000" y="685800"/>
+            <a:ext cx="6096000" cy="3429000"/>
+          </a:xfrm>
+          <a:custGeom>
+            <a:avLst/>
+            <a:gdLst/>
+            <a:ahLst/>
+            <a:cxnLst/>
+            <a:rect l="l" t="t" r="r" b="b"/>
+            <a:pathLst>
+              <a:path w="120000" h="120000" extrusionOk="0">
+                <a:moveTo>
+                  <a:pt x="0" y="0"/>
+                </a:moveTo>
+                <a:lnTo>
+                  <a:pt x="120000" y="0"/>
+                </a:lnTo>
+                <a:lnTo>
+                  <a:pt x="120000" y="120000"/>
+                </a:lnTo>
+                <a:lnTo>
+                  <a:pt x="0" y="120000"/>
+                </a:lnTo>
+                <a:close/>
+              </a:path>
+            </a:pathLst>
+          </a:custGeom>
+        </p:spPr>
+      </p:sp>
+      <p:sp>
+        <p:nvSpPr>
+          <p:cNvPr id="313" name="Google Shape;313;gc6f980f91_0_37:notes"/>
           <p:cNvSpPr txBox="1">
             <a:spLocks noGrp="1"/>
           </p:cNvSpPr>
@@ -22755,15 +23195,7 @@
                   <a:schemeClr val="bg1"/>
                 </a:solidFill>
               </a:rPr>
-              <a:t>Check Out </a:t>
-            </a:r>
-            <a:r>
-              <a:rPr lang="en-GB" sz="2000" dirty="0" smtClean="0">
-                <a:solidFill>
-                  <a:schemeClr val="bg1"/>
-                </a:solidFill>
-              </a:rPr>
-              <a:t>Page</a:t>
+              <a:t>Check Out Page</a:t>
             </a:r>
             <a:endParaRPr lang="en-GB" sz="1800" dirty="0">
               <a:solidFill>
@@ -22775,7 +23207,7 @@
       </p:sp>
       <p:pic>
         <p:nvPicPr>
-          <p:cNvPr id="2" name="Picture 1"/>
+          <p:cNvPr id="5" name="Picture 4"/>
           <p:cNvPicPr>
             <a:picLocks noChangeAspect="1"/>
           </p:cNvPicPr>
@@ -22789,8 +23221,8 @@
         </p:blipFill>
         <p:spPr>
           <a:xfrm>
-            <a:off x="1693720" y="1525995"/>
-            <a:ext cx="7222786" cy="3205876"/>
+            <a:off x="1693719" y="1422128"/>
+            <a:ext cx="7316569" cy="3633949"/>
           </a:xfrm>
           <a:prstGeom prst="rect">
             <a:avLst/>
@@ -22818,6 +23250,986 @@
 </file>
 
 <file path=ppt/slides/slide19.xml><?xml version="1.0" encoding="utf-8"?>
+<p:sld xmlns:a="http://schemas.openxmlformats.org/drawingml/2006/main" xmlns:r="http://schemas.openxmlformats.org/officeDocument/2006/relationships" xmlns:p="http://schemas.openxmlformats.org/presentationml/2006/main">
+  <p:cSld>
+    <p:bg>
+      <p:bgPr>
+        <a:solidFill>
+          <a:srgbClr val="6194E7"/>
+        </a:solidFill>
+        <a:effectLst/>
+      </p:bgPr>
+    </p:bg>
+    <p:spTree>
+      <p:nvGrpSpPr>
+        <p:cNvPr id="1" name="Shape 309"/>
+        <p:cNvGrpSpPr/>
+        <p:nvPr/>
+      </p:nvGrpSpPr>
+      <p:grpSpPr>
+        <a:xfrm>
+          <a:off x="0" y="0"/>
+          <a:ext cx="0" cy="0"/>
+          <a:chOff x="0" y="0"/>
+          <a:chExt cx="0" cy="0"/>
+        </a:xfrm>
+      </p:grpSpPr>
+      <p:sp>
+        <p:nvSpPr>
+          <p:cNvPr id="310" name="Google Shape;310;p18"/>
+          <p:cNvSpPr txBox="1">
+            <a:spLocks noGrp="1"/>
+          </p:cNvSpPr>
+          <p:nvPr>
+            <p:ph type="title"/>
+          </p:nvPr>
+        </p:nvSpPr>
+        <p:spPr>
+          <a:xfrm>
+            <a:off x="1509800" y="272705"/>
+            <a:ext cx="3298420" cy="900775"/>
+          </a:xfrm>
+          <a:prstGeom prst="rect">
+            <a:avLst/>
+          </a:prstGeom>
+        </p:spPr>
+        <p:txBody>
+          <a:bodyPr spcFirstLastPara="1" wrap="square" lIns="91425" tIns="91425" rIns="91425" bIns="91425" anchor="ctr" anchorCtr="0">
+            <a:normAutofit/>
+          </a:bodyPr>
+          <a:lstStyle/>
+          <a:p>
+            <a:pPr marL="0" lvl="0" indent="0" algn="l" rtl="0">
+              <a:spcBef>
+                <a:spcPts val="0"/>
+              </a:spcBef>
+              <a:spcAft>
+                <a:spcPts val="0"/>
+              </a:spcAft>
+              <a:buNone/>
+            </a:pPr>
+            <a:r>
+              <a:rPr lang="en" dirty="0" smtClean="0"/>
+              <a:t>Screen Shorts</a:t>
+            </a:r>
+            <a:endParaRPr dirty="0"/>
+          </a:p>
+        </p:txBody>
+      </p:sp>
+      <p:sp>
+        <p:nvSpPr>
+          <p:cNvPr id="3" name="Oval 2"/>
+          <p:cNvSpPr/>
+          <p:nvPr/>
+        </p:nvSpPr>
+        <p:spPr>
+          <a:xfrm>
+            <a:off x="1693720" y="1125885"/>
+            <a:ext cx="151360" cy="144780"/>
+          </a:xfrm>
+          <a:prstGeom prst="ellipse">
+            <a:avLst/>
+          </a:prstGeom>
+          <a:solidFill>
+            <a:srgbClr val="6194E7"/>
+          </a:solidFill>
+          <a:ln>
+            <a:solidFill>
+              <a:srgbClr val="6FA8DC"/>
+            </a:solidFill>
+          </a:ln>
+        </p:spPr>
+        <p:style>
+          <a:lnRef idx="2">
+            <a:schemeClr val="accent1">
+              <a:shade val="50000"/>
+            </a:schemeClr>
+          </a:lnRef>
+          <a:fillRef idx="1">
+            <a:schemeClr val="accent1"/>
+          </a:fillRef>
+          <a:effectRef idx="0">
+            <a:schemeClr val="accent1"/>
+          </a:effectRef>
+          <a:fontRef idx="minor">
+            <a:schemeClr val="lt1"/>
+          </a:fontRef>
+        </p:style>
+        <p:txBody>
+          <a:bodyPr rtlCol="0" anchor="ctr"/>
+          <a:lstStyle/>
+          <a:p>
+            <a:pPr algn="ctr"/>
+            <a:endParaRPr lang="en-GB">
+              <a:solidFill>
+                <a:schemeClr val="bg1"/>
+              </a:solidFill>
+            </a:endParaRPr>
+          </a:p>
+        </p:txBody>
+      </p:sp>
+      <p:sp>
+        <p:nvSpPr>
+          <p:cNvPr id="4" name="TextBox 3"/>
+          <p:cNvSpPr txBox="1"/>
+          <p:nvPr/>
+        </p:nvSpPr>
+        <p:spPr>
+          <a:xfrm>
+            <a:off x="1845080" y="1022018"/>
+            <a:ext cx="3092680" cy="400110"/>
+          </a:xfrm>
+          <a:prstGeom prst="rect">
+            <a:avLst/>
+          </a:prstGeom>
+          <a:noFill/>
+        </p:spPr>
+        <p:txBody>
+          <a:bodyPr wrap="square" rtlCol="0">
+            <a:spAutoFit/>
+          </a:bodyPr>
+          <a:lstStyle/>
+          <a:p>
+            <a:r>
+              <a:rPr lang="en-GB" sz="2000" dirty="0" smtClean="0">
+                <a:solidFill>
+                  <a:schemeClr val="bg1"/>
+                </a:solidFill>
+              </a:rPr>
+              <a:t>Forgot Password</a:t>
+            </a:r>
+            <a:r>
+              <a:rPr lang="en-GB" sz="2000" dirty="0" smtClean="0">
+                <a:solidFill>
+                  <a:schemeClr val="bg1"/>
+                </a:solidFill>
+              </a:rPr>
+              <a:t> </a:t>
+            </a:r>
+            <a:r>
+              <a:rPr lang="en-GB" sz="2000" dirty="0" smtClean="0">
+                <a:solidFill>
+                  <a:schemeClr val="bg1"/>
+                </a:solidFill>
+              </a:rPr>
+              <a:t>Page</a:t>
+            </a:r>
+            <a:endParaRPr lang="en-GB" sz="1800" dirty="0">
+              <a:solidFill>
+                <a:schemeClr val="bg1"/>
+              </a:solidFill>
+            </a:endParaRPr>
+          </a:p>
+        </p:txBody>
+      </p:sp>
+      <p:pic>
+        <p:nvPicPr>
+          <p:cNvPr id="6" name="Picture 5"/>
+          <p:cNvPicPr>
+            <a:picLocks noChangeAspect="1"/>
+          </p:cNvPicPr>
+          <p:nvPr/>
+        </p:nvPicPr>
+        <p:blipFill>
+          <a:blip r:embed="rId3"/>
+          <a:stretch>
+            <a:fillRect/>
+          </a:stretch>
+        </p:blipFill>
+        <p:spPr>
+          <a:xfrm>
+            <a:off x="1845080" y="1658642"/>
+            <a:ext cx="6761608" cy="2866061"/>
+          </a:xfrm>
+          <a:prstGeom prst="rect">
+            <a:avLst/>
+          </a:prstGeom>
+        </p:spPr>
+      </p:pic>
+    </p:spTree>
+    <p:extLst>
+      <p:ext uri="{BB962C8B-B14F-4D97-AF65-F5344CB8AC3E}">
+        <p14:creationId xmlns:p14="http://schemas.microsoft.com/office/powerpoint/2010/main" val="3176734041"/>
+      </p:ext>
+    </p:extLst>
+  </p:cSld>
+  <p:clrMapOvr>
+    <a:masterClrMapping/>
+  </p:clrMapOvr>
+  <p:timing>
+    <p:tnLst>
+      <p:par>
+        <p:cTn id="1" dur="indefinite" restart="never" nodeType="tmRoot"/>
+      </p:par>
+    </p:tnLst>
+  </p:timing>
+</p:sld>
+</file>
+
+<file path=ppt/slides/slide2.xml><?xml version="1.0" encoding="utf-8"?>
+<p:sld xmlns:a="http://schemas.openxmlformats.org/drawingml/2006/main" xmlns:r="http://schemas.openxmlformats.org/officeDocument/2006/relationships" xmlns:p="http://schemas.openxmlformats.org/presentationml/2006/main">
+  <p:cSld>
+    <p:spTree>
+      <p:nvGrpSpPr>
+        <p:cNvPr id="1" name="Shape 284"/>
+        <p:cNvGrpSpPr/>
+        <p:nvPr/>
+      </p:nvGrpSpPr>
+      <p:grpSpPr>
+        <a:xfrm>
+          <a:off x="0" y="0"/>
+          <a:ext cx="0" cy="0"/>
+          <a:chOff x="0" y="0"/>
+          <a:chExt cx="0" cy="0"/>
+        </a:xfrm>
+      </p:grpSpPr>
+      <p:sp>
+        <p:nvSpPr>
+          <p:cNvPr id="285" name="Google Shape;285;p14"/>
+          <p:cNvSpPr txBox="1">
+            <a:spLocks noGrp="1"/>
+          </p:cNvSpPr>
+          <p:nvPr>
+            <p:ph type="title"/>
+          </p:nvPr>
+        </p:nvSpPr>
+        <p:spPr>
+          <a:xfrm>
+            <a:off x="1303800" y="598575"/>
+            <a:ext cx="7030500" cy="999300"/>
+          </a:xfrm>
+          <a:prstGeom prst="rect">
+            <a:avLst/>
+          </a:prstGeom>
+        </p:spPr>
+        <p:txBody>
+          <a:bodyPr spcFirstLastPara="1" wrap="square" lIns="91425" tIns="91425" rIns="91425" bIns="91425" anchor="t" anchorCtr="0">
+            <a:normAutofit/>
+          </a:bodyPr>
+          <a:lstStyle/>
+          <a:p>
+            <a:pPr marL="0" lvl="0" indent="0" algn="l" rtl="0">
+              <a:spcBef>
+                <a:spcPts val="0"/>
+              </a:spcBef>
+              <a:spcAft>
+                <a:spcPts val="0"/>
+              </a:spcAft>
+              <a:buNone/>
+            </a:pPr>
+            <a:r>
+              <a:rPr lang="en" sz="3100"/>
+              <a:t>About Company </a:t>
+            </a:r>
+            <a:endParaRPr sz="3100"/>
+          </a:p>
+        </p:txBody>
+      </p:sp>
+      <p:sp>
+        <p:nvSpPr>
+          <p:cNvPr id="286" name="Google Shape;286;p14"/>
+          <p:cNvSpPr txBox="1">
+            <a:spLocks noGrp="1"/>
+          </p:cNvSpPr>
+          <p:nvPr>
+            <p:ph type="body" idx="1"/>
+          </p:nvPr>
+        </p:nvSpPr>
+        <p:spPr>
+          <a:xfrm>
+            <a:off x="1303800" y="1990050"/>
+            <a:ext cx="7030500" cy="2541600"/>
+          </a:xfrm>
+          <a:prstGeom prst="rect">
+            <a:avLst/>
+          </a:prstGeom>
+        </p:spPr>
+        <p:txBody>
+          <a:bodyPr spcFirstLastPara="1" wrap="square" lIns="91425" tIns="91425" rIns="91425" bIns="91425" anchor="t" anchorCtr="0">
+            <a:noAutofit/>
+          </a:bodyPr>
+          <a:lstStyle/>
+          <a:p>
+            <a:pPr marL="0" lvl="0" indent="0" algn="l" rtl="0">
+              <a:spcBef>
+                <a:spcPts val="0"/>
+              </a:spcBef>
+              <a:spcAft>
+                <a:spcPts val="1200"/>
+              </a:spcAft>
+              <a:buNone/>
+            </a:pPr>
+            <a:r>
+              <a:rPr lang="en" sz="1800" i="1" dirty="0">
+                <a:solidFill>
+                  <a:srgbClr val="000000"/>
+                </a:solidFill>
+              </a:rPr>
+              <a:t>Decent Infoway, founded in 2013, is an IT services company based in Rajkot, Gujarat, India. We specialize in custom software development, web and mobile applications, digital solutions and consultancy. Our expertise spans modern technologies including the MERN stack, Flutter, ASP.NET, and cloud platforms. Committed to quality, innovation and customer satisfaction, Decent Infoway empowers businesses to succeed in the digital era through reliable, scalable, and cost-effective technology solutions.</a:t>
+            </a:r>
+            <a:endParaRPr sz="1800" i="1" dirty="0">
+              <a:solidFill>
+                <a:srgbClr val="000000"/>
+              </a:solidFill>
+            </a:endParaRPr>
+          </a:p>
+        </p:txBody>
+      </p:sp>
+      <p:pic>
+        <p:nvPicPr>
+          <p:cNvPr id="287" name="Google Shape;287;p14"/>
+          <p:cNvPicPr preferRelativeResize="0"/>
+          <p:nvPr/>
+        </p:nvPicPr>
+        <p:blipFill>
+          <a:blip r:embed="rId3">
+            <a:alphaModFix/>
+          </a:blip>
+          <a:stretch>
+            <a:fillRect/>
+          </a:stretch>
+        </p:blipFill>
+        <p:spPr>
+          <a:xfrm>
+            <a:off x="5461738" y="164525"/>
+            <a:ext cx="3000375" cy="1524000"/>
+          </a:xfrm>
+          <a:prstGeom prst="rect">
+            <a:avLst/>
+          </a:prstGeom>
+          <a:noFill/>
+          <a:ln>
+            <a:noFill/>
+          </a:ln>
+        </p:spPr>
+      </p:pic>
+    </p:spTree>
+  </p:cSld>
+  <p:clrMapOvr>
+    <a:masterClrMapping/>
+  </p:clrMapOvr>
+  <p:timing>
+    <p:tnLst>
+      <p:par>
+        <p:cTn id="1" dur="indefinite" restart="never" nodeType="tmRoot"/>
+      </p:par>
+    </p:tnLst>
+  </p:timing>
+</p:sld>
+</file>
+
+<file path=ppt/slides/slide20.xml><?xml version="1.0" encoding="utf-8"?>
+<p:sld xmlns:a="http://schemas.openxmlformats.org/drawingml/2006/main" xmlns:r="http://schemas.openxmlformats.org/officeDocument/2006/relationships" xmlns:p="http://schemas.openxmlformats.org/presentationml/2006/main">
+  <p:cSld>
+    <p:bg>
+      <p:bgPr>
+        <a:solidFill>
+          <a:srgbClr val="6194E7"/>
+        </a:solidFill>
+        <a:effectLst/>
+      </p:bgPr>
+    </p:bg>
+    <p:spTree>
+      <p:nvGrpSpPr>
+        <p:cNvPr id="1" name="Shape 309"/>
+        <p:cNvGrpSpPr/>
+        <p:nvPr/>
+      </p:nvGrpSpPr>
+      <p:grpSpPr>
+        <a:xfrm>
+          <a:off x="0" y="0"/>
+          <a:ext cx="0" cy="0"/>
+          <a:chOff x="0" y="0"/>
+          <a:chExt cx="0" cy="0"/>
+        </a:xfrm>
+      </p:grpSpPr>
+      <p:sp>
+        <p:nvSpPr>
+          <p:cNvPr id="310" name="Google Shape;310;p18"/>
+          <p:cNvSpPr txBox="1">
+            <a:spLocks noGrp="1"/>
+          </p:cNvSpPr>
+          <p:nvPr>
+            <p:ph type="title"/>
+          </p:nvPr>
+        </p:nvSpPr>
+        <p:spPr>
+          <a:xfrm>
+            <a:off x="1509800" y="272705"/>
+            <a:ext cx="3298420" cy="900775"/>
+          </a:xfrm>
+          <a:prstGeom prst="rect">
+            <a:avLst/>
+          </a:prstGeom>
+        </p:spPr>
+        <p:txBody>
+          <a:bodyPr spcFirstLastPara="1" wrap="square" lIns="91425" tIns="91425" rIns="91425" bIns="91425" anchor="ctr" anchorCtr="0">
+            <a:normAutofit/>
+          </a:bodyPr>
+          <a:lstStyle/>
+          <a:p>
+            <a:pPr marL="0" lvl="0" indent="0" algn="l" rtl="0">
+              <a:spcBef>
+                <a:spcPts val="0"/>
+              </a:spcBef>
+              <a:spcAft>
+                <a:spcPts val="0"/>
+              </a:spcAft>
+              <a:buNone/>
+            </a:pPr>
+            <a:r>
+              <a:rPr lang="en" dirty="0" smtClean="0"/>
+              <a:t>Screen Shorts</a:t>
+            </a:r>
+            <a:endParaRPr dirty="0"/>
+          </a:p>
+        </p:txBody>
+      </p:sp>
+      <p:sp>
+        <p:nvSpPr>
+          <p:cNvPr id="3" name="Oval 2"/>
+          <p:cNvSpPr/>
+          <p:nvPr/>
+        </p:nvSpPr>
+        <p:spPr>
+          <a:xfrm>
+            <a:off x="1693720" y="1125885"/>
+            <a:ext cx="151360" cy="144780"/>
+          </a:xfrm>
+          <a:prstGeom prst="ellipse">
+            <a:avLst/>
+          </a:prstGeom>
+          <a:solidFill>
+            <a:srgbClr val="6194E7"/>
+          </a:solidFill>
+          <a:ln>
+            <a:solidFill>
+              <a:srgbClr val="6FA8DC"/>
+            </a:solidFill>
+          </a:ln>
+        </p:spPr>
+        <p:style>
+          <a:lnRef idx="2">
+            <a:schemeClr val="accent1">
+              <a:shade val="50000"/>
+            </a:schemeClr>
+          </a:lnRef>
+          <a:fillRef idx="1">
+            <a:schemeClr val="accent1"/>
+          </a:fillRef>
+          <a:effectRef idx="0">
+            <a:schemeClr val="accent1"/>
+          </a:effectRef>
+          <a:fontRef idx="minor">
+            <a:schemeClr val="lt1"/>
+          </a:fontRef>
+        </p:style>
+        <p:txBody>
+          <a:bodyPr rtlCol="0" anchor="ctr"/>
+          <a:lstStyle/>
+          <a:p>
+            <a:pPr algn="ctr"/>
+            <a:endParaRPr lang="en-GB">
+              <a:solidFill>
+                <a:schemeClr val="bg1"/>
+              </a:solidFill>
+            </a:endParaRPr>
+          </a:p>
+        </p:txBody>
+      </p:sp>
+      <p:sp>
+        <p:nvSpPr>
+          <p:cNvPr id="4" name="TextBox 3"/>
+          <p:cNvSpPr txBox="1"/>
+          <p:nvPr/>
+        </p:nvSpPr>
+        <p:spPr>
+          <a:xfrm>
+            <a:off x="1845080" y="1022018"/>
+            <a:ext cx="3092680" cy="400110"/>
+          </a:xfrm>
+          <a:prstGeom prst="rect">
+            <a:avLst/>
+          </a:prstGeom>
+          <a:noFill/>
+        </p:spPr>
+        <p:txBody>
+          <a:bodyPr wrap="square" rtlCol="0">
+            <a:spAutoFit/>
+          </a:bodyPr>
+          <a:lstStyle/>
+          <a:p>
+            <a:r>
+              <a:rPr lang="en-GB" sz="2000" dirty="0" smtClean="0">
+                <a:solidFill>
+                  <a:schemeClr val="bg1"/>
+                </a:solidFill>
+              </a:rPr>
+              <a:t>Mail receive (User)</a:t>
+            </a:r>
+            <a:endParaRPr lang="en-GB" sz="1800" dirty="0">
+              <a:solidFill>
+                <a:schemeClr val="bg1"/>
+              </a:solidFill>
+            </a:endParaRPr>
+          </a:p>
+        </p:txBody>
+      </p:sp>
+      <p:pic>
+        <p:nvPicPr>
+          <p:cNvPr id="2" name="Picture 1"/>
+          <p:cNvPicPr>
+            <a:picLocks noChangeAspect="1"/>
+          </p:cNvPicPr>
+          <p:nvPr/>
+        </p:nvPicPr>
+        <p:blipFill>
+          <a:blip r:embed="rId3"/>
+          <a:stretch>
+            <a:fillRect/>
+          </a:stretch>
+        </p:blipFill>
+        <p:spPr>
+          <a:xfrm>
+            <a:off x="1693720" y="1525995"/>
+            <a:ext cx="7122620" cy="3502767"/>
+          </a:xfrm>
+          <a:prstGeom prst="rect">
+            <a:avLst/>
+          </a:prstGeom>
+        </p:spPr>
+      </p:pic>
+    </p:spTree>
+    <p:extLst>
+      <p:ext uri="{BB962C8B-B14F-4D97-AF65-F5344CB8AC3E}">
+        <p14:creationId xmlns:p14="http://schemas.microsoft.com/office/powerpoint/2010/main" val="2847661585"/>
+      </p:ext>
+    </p:extLst>
+  </p:cSld>
+  <p:clrMapOvr>
+    <a:masterClrMapping/>
+  </p:clrMapOvr>
+  <p:timing>
+    <p:tnLst>
+      <p:par>
+        <p:cTn id="1" dur="indefinite" restart="never" nodeType="tmRoot"/>
+      </p:par>
+    </p:tnLst>
+  </p:timing>
+</p:sld>
+</file>
+
+<file path=ppt/slides/slide21.xml><?xml version="1.0" encoding="utf-8"?>
+<p:sld xmlns:a="http://schemas.openxmlformats.org/drawingml/2006/main" xmlns:r="http://schemas.openxmlformats.org/officeDocument/2006/relationships" xmlns:p="http://schemas.openxmlformats.org/presentationml/2006/main">
+  <p:cSld>
+    <p:bg>
+      <p:bgPr>
+        <a:solidFill>
+          <a:srgbClr val="6194E7"/>
+        </a:solidFill>
+        <a:effectLst/>
+      </p:bgPr>
+    </p:bg>
+    <p:spTree>
+      <p:nvGrpSpPr>
+        <p:cNvPr id="1" name="Shape 309"/>
+        <p:cNvGrpSpPr/>
+        <p:nvPr/>
+      </p:nvGrpSpPr>
+      <p:grpSpPr>
+        <a:xfrm>
+          <a:off x="0" y="0"/>
+          <a:ext cx="0" cy="0"/>
+          <a:chOff x="0" y="0"/>
+          <a:chExt cx="0" cy="0"/>
+        </a:xfrm>
+      </p:grpSpPr>
+      <p:sp>
+        <p:nvSpPr>
+          <p:cNvPr id="310" name="Google Shape;310;p18"/>
+          <p:cNvSpPr txBox="1">
+            <a:spLocks noGrp="1"/>
+          </p:cNvSpPr>
+          <p:nvPr>
+            <p:ph type="title"/>
+          </p:nvPr>
+        </p:nvSpPr>
+        <p:spPr>
+          <a:xfrm>
+            <a:off x="1509800" y="272705"/>
+            <a:ext cx="3298420" cy="900775"/>
+          </a:xfrm>
+          <a:prstGeom prst="rect">
+            <a:avLst/>
+          </a:prstGeom>
+        </p:spPr>
+        <p:txBody>
+          <a:bodyPr spcFirstLastPara="1" wrap="square" lIns="91425" tIns="91425" rIns="91425" bIns="91425" anchor="ctr" anchorCtr="0">
+            <a:normAutofit/>
+          </a:bodyPr>
+          <a:lstStyle/>
+          <a:p>
+            <a:pPr marL="0" lvl="0" indent="0" algn="l" rtl="0">
+              <a:spcBef>
+                <a:spcPts val="0"/>
+              </a:spcBef>
+              <a:spcAft>
+                <a:spcPts val="0"/>
+              </a:spcAft>
+              <a:buNone/>
+            </a:pPr>
+            <a:r>
+              <a:rPr lang="en" dirty="0" smtClean="0"/>
+              <a:t>Screen Shorts</a:t>
+            </a:r>
+            <a:endParaRPr dirty="0"/>
+          </a:p>
+        </p:txBody>
+      </p:sp>
+      <p:sp>
+        <p:nvSpPr>
+          <p:cNvPr id="3" name="Oval 2"/>
+          <p:cNvSpPr/>
+          <p:nvPr/>
+        </p:nvSpPr>
+        <p:spPr>
+          <a:xfrm>
+            <a:off x="1693720" y="1125885"/>
+            <a:ext cx="151360" cy="144780"/>
+          </a:xfrm>
+          <a:prstGeom prst="ellipse">
+            <a:avLst/>
+          </a:prstGeom>
+          <a:solidFill>
+            <a:srgbClr val="6194E7"/>
+          </a:solidFill>
+          <a:ln>
+            <a:solidFill>
+              <a:srgbClr val="6FA8DC"/>
+            </a:solidFill>
+          </a:ln>
+        </p:spPr>
+        <p:style>
+          <a:lnRef idx="2">
+            <a:schemeClr val="accent1">
+              <a:shade val="50000"/>
+            </a:schemeClr>
+          </a:lnRef>
+          <a:fillRef idx="1">
+            <a:schemeClr val="accent1"/>
+          </a:fillRef>
+          <a:effectRef idx="0">
+            <a:schemeClr val="accent1"/>
+          </a:effectRef>
+          <a:fontRef idx="minor">
+            <a:schemeClr val="lt1"/>
+          </a:fontRef>
+        </p:style>
+        <p:txBody>
+          <a:bodyPr rtlCol="0" anchor="ctr"/>
+          <a:lstStyle/>
+          <a:p>
+            <a:pPr algn="ctr"/>
+            <a:endParaRPr lang="en-GB">
+              <a:solidFill>
+                <a:schemeClr val="bg1"/>
+              </a:solidFill>
+            </a:endParaRPr>
+          </a:p>
+        </p:txBody>
+      </p:sp>
+      <p:sp>
+        <p:nvSpPr>
+          <p:cNvPr id="4" name="TextBox 3"/>
+          <p:cNvSpPr txBox="1"/>
+          <p:nvPr/>
+        </p:nvSpPr>
+        <p:spPr>
+          <a:xfrm>
+            <a:off x="1845080" y="1022018"/>
+            <a:ext cx="3092680" cy="400110"/>
+          </a:xfrm>
+          <a:prstGeom prst="rect">
+            <a:avLst/>
+          </a:prstGeom>
+          <a:noFill/>
+        </p:spPr>
+        <p:txBody>
+          <a:bodyPr wrap="square" rtlCol="0">
+            <a:spAutoFit/>
+          </a:bodyPr>
+          <a:lstStyle/>
+          <a:p>
+            <a:r>
+              <a:rPr lang="en-GB" sz="2000" dirty="0" smtClean="0">
+                <a:solidFill>
+                  <a:schemeClr val="bg1"/>
+                </a:solidFill>
+              </a:rPr>
+              <a:t>OTP Verification Page</a:t>
+            </a:r>
+            <a:endParaRPr lang="en-GB" sz="1800" dirty="0">
+              <a:solidFill>
+                <a:schemeClr val="bg1"/>
+              </a:solidFill>
+            </a:endParaRPr>
+          </a:p>
+        </p:txBody>
+      </p:sp>
+      <p:pic>
+        <p:nvPicPr>
+          <p:cNvPr id="6" name="Picture 5"/>
+          <p:cNvPicPr>
+            <a:picLocks noChangeAspect="1"/>
+          </p:cNvPicPr>
+          <p:nvPr/>
+        </p:nvPicPr>
+        <p:blipFill>
+          <a:blip r:embed="rId3"/>
+          <a:stretch>
+            <a:fillRect/>
+          </a:stretch>
+        </p:blipFill>
+        <p:spPr>
+          <a:xfrm>
+            <a:off x="1845080" y="1746738"/>
+            <a:ext cx="6148300" cy="3085748"/>
+          </a:xfrm>
+          <a:prstGeom prst="rect">
+            <a:avLst/>
+          </a:prstGeom>
+        </p:spPr>
+      </p:pic>
+    </p:spTree>
+    <p:extLst>
+      <p:ext uri="{BB962C8B-B14F-4D97-AF65-F5344CB8AC3E}">
+        <p14:creationId xmlns:p14="http://schemas.microsoft.com/office/powerpoint/2010/main" val="1821776377"/>
+      </p:ext>
+    </p:extLst>
+  </p:cSld>
+  <p:clrMapOvr>
+    <a:masterClrMapping/>
+  </p:clrMapOvr>
+  <p:timing>
+    <p:tnLst>
+      <p:par>
+        <p:cTn id="1" dur="indefinite" restart="never" nodeType="tmRoot"/>
+      </p:par>
+    </p:tnLst>
+  </p:timing>
+</p:sld>
+</file>
+
+<file path=ppt/slides/slide22.xml><?xml version="1.0" encoding="utf-8"?>
+<p:sld xmlns:a="http://schemas.openxmlformats.org/drawingml/2006/main" xmlns:r="http://schemas.openxmlformats.org/officeDocument/2006/relationships" xmlns:p="http://schemas.openxmlformats.org/presentationml/2006/main">
+  <p:cSld>
+    <p:bg>
+      <p:bgPr>
+        <a:solidFill>
+          <a:srgbClr val="6194E7"/>
+        </a:solidFill>
+        <a:effectLst/>
+      </p:bgPr>
+    </p:bg>
+    <p:spTree>
+      <p:nvGrpSpPr>
+        <p:cNvPr id="1" name="Shape 309"/>
+        <p:cNvGrpSpPr/>
+        <p:nvPr/>
+      </p:nvGrpSpPr>
+      <p:grpSpPr>
+        <a:xfrm>
+          <a:off x="0" y="0"/>
+          <a:ext cx="0" cy="0"/>
+          <a:chOff x="0" y="0"/>
+          <a:chExt cx="0" cy="0"/>
+        </a:xfrm>
+      </p:grpSpPr>
+      <p:sp>
+        <p:nvSpPr>
+          <p:cNvPr id="310" name="Google Shape;310;p18"/>
+          <p:cNvSpPr txBox="1">
+            <a:spLocks noGrp="1"/>
+          </p:cNvSpPr>
+          <p:nvPr>
+            <p:ph type="title"/>
+          </p:nvPr>
+        </p:nvSpPr>
+        <p:spPr>
+          <a:xfrm>
+            <a:off x="1509800" y="272705"/>
+            <a:ext cx="3298420" cy="900775"/>
+          </a:xfrm>
+          <a:prstGeom prst="rect">
+            <a:avLst/>
+          </a:prstGeom>
+        </p:spPr>
+        <p:txBody>
+          <a:bodyPr spcFirstLastPara="1" wrap="square" lIns="91425" tIns="91425" rIns="91425" bIns="91425" anchor="ctr" anchorCtr="0">
+            <a:normAutofit/>
+          </a:bodyPr>
+          <a:lstStyle/>
+          <a:p>
+            <a:pPr marL="0" lvl="0" indent="0" algn="l" rtl="0">
+              <a:spcBef>
+                <a:spcPts val="0"/>
+              </a:spcBef>
+              <a:spcAft>
+                <a:spcPts val="0"/>
+              </a:spcAft>
+              <a:buNone/>
+            </a:pPr>
+            <a:r>
+              <a:rPr lang="en" dirty="0" smtClean="0"/>
+              <a:t>Screen Shorts</a:t>
+            </a:r>
+            <a:endParaRPr dirty="0"/>
+          </a:p>
+        </p:txBody>
+      </p:sp>
+      <p:sp>
+        <p:nvSpPr>
+          <p:cNvPr id="3" name="Oval 2"/>
+          <p:cNvSpPr/>
+          <p:nvPr/>
+        </p:nvSpPr>
+        <p:spPr>
+          <a:xfrm>
+            <a:off x="1693720" y="1125885"/>
+            <a:ext cx="151360" cy="144780"/>
+          </a:xfrm>
+          <a:prstGeom prst="ellipse">
+            <a:avLst/>
+          </a:prstGeom>
+          <a:solidFill>
+            <a:srgbClr val="6194E7"/>
+          </a:solidFill>
+          <a:ln>
+            <a:solidFill>
+              <a:srgbClr val="6FA8DC"/>
+            </a:solidFill>
+          </a:ln>
+        </p:spPr>
+        <p:style>
+          <a:lnRef idx="2">
+            <a:schemeClr val="accent1">
+              <a:shade val="50000"/>
+            </a:schemeClr>
+          </a:lnRef>
+          <a:fillRef idx="1">
+            <a:schemeClr val="accent1"/>
+          </a:fillRef>
+          <a:effectRef idx="0">
+            <a:schemeClr val="accent1"/>
+          </a:effectRef>
+          <a:fontRef idx="minor">
+            <a:schemeClr val="lt1"/>
+          </a:fontRef>
+        </p:style>
+        <p:txBody>
+          <a:bodyPr rtlCol="0" anchor="ctr"/>
+          <a:lstStyle/>
+          <a:p>
+            <a:pPr algn="ctr"/>
+            <a:endParaRPr lang="en-GB">
+              <a:solidFill>
+                <a:schemeClr val="bg1"/>
+              </a:solidFill>
+            </a:endParaRPr>
+          </a:p>
+        </p:txBody>
+      </p:sp>
+      <p:sp>
+        <p:nvSpPr>
+          <p:cNvPr id="4" name="TextBox 3"/>
+          <p:cNvSpPr txBox="1"/>
+          <p:nvPr/>
+        </p:nvSpPr>
+        <p:spPr>
+          <a:xfrm>
+            <a:off x="1845080" y="1022018"/>
+            <a:ext cx="3092680" cy="400110"/>
+          </a:xfrm>
+          <a:prstGeom prst="rect">
+            <a:avLst/>
+          </a:prstGeom>
+          <a:noFill/>
+        </p:spPr>
+        <p:txBody>
+          <a:bodyPr wrap="square" rtlCol="0">
+            <a:spAutoFit/>
+          </a:bodyPr>
+          <a:lstStyle/>
+          <a:p>
+            <a:r>
+              <a:rPr lang="en-GB" sz="2000" dirty="0" smtClean="0">
+                <a:solidFill>
+                  <a:schemeClr val="bg1"/>
+                </a:solidFill>
+              </a:rPr>
+              <a:t>Reset Password </a:t>
+            </a:r>
+            <a:r>
+              <a:rPr lang="en-GB" sz="2000" dirty="0" smtClean="0">
+                <a:solidFill>
+                  <a:schemeClr val="bg1"/>
+                </a:solidFill>
+              </a:rPr>
+              <a:t>Page</a:t>
+            </a:r>
+            <a:endParaRPr lang="en-GB" sz="1800" dirty="0">
+              <a:solidFill>
+                <a:schemeClr val="bg1"/>
+              </a:solidFill>
+            </a:endParaRPr>
+          </a:p>
+        </p:txBody>
+      </p:sp>
+      <p:pic>
+        <p:nvPicPr>
+          <p:cNvPr id="5" name="Picture 4"/>
+          <p:cNvPicPr>
+            <a:picLocks noChangeAspect="1"/>
+          </p:cNvPicPr>
+          <p:nvPr/>
+        </p:nvPicPr>
+        <p:blipFill>
+          <a:blip r:embed="rId3"/>
+          <a:stretch>
+            <a:fillRect/>
+          </a:stretch>
+        </p:blipFill>
+        <p:spPr>
+          <a:xfrm>
+            <a:off x="1838018" y="1762712"/>
+            <a:ext cx="6970702" cy="3138349"/>
+          </a:xfrm>
+          <a:prstGeom prst="rect">
+            <a:avLst/>
+          </a:prstGeom>
+        </p:spPr>
+      </p:pic>
+    </p:spTree>
+    <p:extLst>
+      <p:ext uri="{BB962C8B-B14F-4D97-AF65-F5344CB8AC3E}">
+        <p14:creationId xmlns:p14="http://schemas.microsoft.com/office/powerpoint/2010/main" val="4078553648"/>
+      </p:ext>
+    </p:extLst>
+  </p:cSld>
+  <p:clrMapOvr>
+    <a:masterClrMapping/>
+  </p:clrMapOvr>
+  <p:timing>
+    <p:tnLst>
+      <p:par>
+        <p:cTn id="1" dur="indefinite" restart="never" nodeType="tmRoot"/>
+      </p:par>
+    </p:tnLst>
+  </p:timing>
+</p:sld>
+</file>
+
+<file path=ppt/slides/slide23.xml><?xml version="1.0" encoding="utf-8"?>
 <p:sld xmlns:a="http://schemas.openxmlformats.org/drawingml/2006/main" xmlns:r="http://schemas.openxmlformats.org/officeDocument/2006/relationships" xmlns:p="http://schemas.openxmlformats.org/presentationml/2006/main">
   <p:cSld>
     <p:spTree>
@@ -23204,159 +24616,7 @@
 </p:sld>
 </file>
 
-<file path=ppt/slides/slide2.xml><?xml version="1.0" encoding="utf-8"?>
-<p:sld xmlns:a="http://schemas.openxmlformats.org/drawingml/2006/main" xmlns:r="http://schemas.openxmlformats.org/officeDocument/2006/relationships" xmlns:p="http://schemas.openxmlformats.org/presentationml/2006/main">
-  <p:cSld>
-    <p:spTree>
-      <p:nvGrpSpPr>
-        <p:cNvPr id="1" name="Shape 284"/>
-        <p:cNvGrpSpPr/>
-        <p:nvPr/>
-      </p:nvGrpSpPr>
-      <p:grpSpPr>
-        <a:xfrm>
-          <a:off x="0" y="0"/>
-          <a:ext cx="0" cy="0"/>
-          <a:chOff x="0" y="0"/>
-          <a:chExt cx="0" cy="0"/>
-        </a:xfrm>
-      </p:grpSpPr>
-      <p:sp>
-        <p:nvSpPr>
-          <p:cNvPr id="285" name="Google Shape;285;p14"/>
-          <p:cNvSpPr txBox="1">
-            <a:spLocks noGrp="1"/>
-          </p:cNvSpPr>
-          <p:nvPr>
-            <p:ph type="title"/>
-          </p:nvPr>
-        </p:nvSpPr>
-        <p:spPr>
-          <a:xfrm>
-            <a:off x="1303800" y="598575"/>
-            <a:ext cx="7030500" cy="999300"/>
-          </a:xfrm>
-          <a:prstGeom prst="rect">
-            <a:avLst/>
-          </a:prstGeom>
-        </p:spPr>
-        <p:txBody>
-          <a:bodyPr spcFirstLastPara="1" wrap="square" lIns="91425" tIns="91425" rIns="91425" bIns="91425" anchor="t" anchorCtr="0">
-            <a:normAutofit/>
-          </a:bodyPr>
-          <a:lstStyle/>
-          <a:p>
-            <a:pPr marL="0" lvl="0" indent="0" algn="l" rtl="0">
-              <a:spcBef>
-                <a:spcPts val="0"/>
-              </a:spcBef>
-              <a:spcAft>
-                <a:spcPts val="0"/>
-              </a:spcAft>
-              <a:buNone/>
-            </a:pPr>
-            <a:r>
-              <a:rPr lang="en" sz="3100"/>
-              <a:t>About Company </a:t>
-            </a:r>
-            <a:endParaRPr sz="3100"/>
-          </a:p>
-        </p:txBody>
-      </p:sp>
-      <p:sp>
-        <p:nvSpPr>
-          <p:cNvPr id="286" name="Google Shape;286;p14"/>
-          <p:cNvSpPr txBox="1">
-            <a:spLocks noGrp="1"/>
-          </p:cNvSpPr>
-          <p:nvPr>
-            <p:ph type="body" idx="1"/>
-          </p:nvPr>
-        </p:nvSpPr>
-        <p:spPr>
-          <a:xfrm>
-            <a:off x="1303800" y="1990050"/>
-            <a:ext cx="7030500" cy="2541600"/>
-          </a:xfrm>
-          <a:prstGeom prst="rect">
-            <a:avLst/>
-          </a:prstGeom>
-        </p:spPr>
-        <p:txBody>
-          <a:bodyPr spcFirstLastPara="1" wrap="square" lIns="91425" tIns="91425" rIns="91425" bIns="91425" anchor="t" anchorCtr="0">
-            <a:noAutofit/>
-          </a:bodyPr>
-          <a:lstStyle/>
-          <a:p>
-            <a:pPr marL="0" lvl="0" indent="0" algn="l" rtl="0">
-              <a:spcBef>
-                <a:spcPts val="0"/>
-              </a:spcBef>
-              <a:spcAft>
-                <a:spcPts val="1200"/>
-              </a:spcAft>
-              <a:buNone/>
-            </a:pPr>
-            <a:r>
-              <a:rPr lang="en" sz="1800" i="1" dirty="0">
-                <a:solidFill>
-                  <a:srgbClr val="000000"/>
-                </a:solidFill>
-              </a:rPr>
-              <a:t>Decent Infoway, founded in 2013, is an IT services company based in Rajkot, Gujarat, India. We specialize in custom software development, web and mobile applications, digital solutions and consultancy. Our expertise spans modern technologies including the MERN stack, Flutter, ASP.NET, and cloud platforms. Committed to quality, innovation and customer satisfaction, Decent Infoway empowers businesses to succeed in the digital era through reliable, scalable, and cost-effective technology solutions.</a:t>
-            </a:r>
-            <a:endParaRPr sz="1800" i="1" dirty="0">
-              <a:solidFill>
-                <a:srgbClr val="000000"/>
-              </a:solidFill>
-            </a:endParaRPr>
-          </a:p>
-        </p:txBody>
-      </p:sp>
-      <p:pic>
-        <p:nvPicPr>
-          <p:cNvPr id="287" name="Google Shape;287;p14"/>
-          <p:cNvPicPr preferRelativeResize="0"/>
-          <p:nvPr/>
-        </p:nvPicPr>
-        <p:blipFill>
-          <a:blip r:embed="rId3">
-            <a:alphaModFix/>
-          </a:blip>
-          <a:stretch>
-            <a:fillRect/>
-          </a:stretch>
-        </p:blipFill>
-        <p:spPr>
-          <a:xfrm>
-            <a:off x="5461738" y="164525"/>
-            <a:ext cx="3000375" cy="1524000"/>
-          </a:xfrm>
-          <a:prstGeom prst="rect">
-            <a:avLst/>
-          </a:prstGeom>
-          <a:noFill/>
-          <a:ln>
-            <a:noFill/>
-          </a:ln>
-        </p:spPr>
-      </p:pic>
-    </p:spTree>
-  </p:cSld>
-  <p:clrMapOvr>
-    <a:masterClrMapping/>
-  </p:clrMapOvr>
-  <p:timing>
-    <p:tnLst>
-      <p:par>
-        <p:cTn id="1" dur="indefinite" restart="never" nodeType="tmRoot"/>
-      </p:par>
-    </p:tnLst>
-  </p:timing>
-</p:sld>
-</file>
-
-<file path=ppt/slides/slide20.xml><?xml version="1.0" encoding="utf-8"?>
+<file path=ppt/slides/slide24.xml><?xml version="1.0" encoding="utf-8"?>
 <p:sld xmlns:a="http://schemas.openxmlformats.org/drawingml/2006/main" xmlns:r="http://schemas.openxmlformats.org/officeDocument/2006/relationships" xmlns:p="http://schemas.openxmlformats.org/presentationml/2006/main">
   <p:cSld>
     <p:spTree>
@@ -23435,45 +24695,55 @@
               </a:lnSpc>
             </a:pPr>
             <a:r>
-              <a:rPr lang="en-GB" dirty="0"/>
-              <a:t>Official docs of </a:t>
+              <a:rPr lang="en-GB" dirty="0" smtClean="0"/>
+              <a:t>Google </a:t>
+            </a:r>
+          </a:p>
+          <a:p>
+            <a:pPr>
+              <a:lnSpc>
+                <a:spcPct val="200000"/>
+              </a:lnSpc>
+            </a:pPr>
+            <a:r>
+              <a:rPr lang="en-GB" dirty="0" err="1" smtClean="0"/>
+              <a:t>ChatGPT</a:t>
+            </a:r>
+            <a:endParaRPr lang="en-GB" dirty="0" smtClean="0"/>
+          </a:p>
+          <a:p>
+            <a:pPr>
+              <a:lnSpc>
+                <a:spcPct val="200000"/>
+              </a:lnSpc>
+            </a:pPr>
+            <a:r>
+              <a:rPr lang="en-GB" dirty="0" err="1" smtClean="0"/>
+              <a:t>Myntra</a:t>
             </a:r>
             <a:r>
-              <a:rPr lang="en-GB" b="1" dirty="0"/>
-              <a:t>MongoDB, Express, React, and Node.js</a:t>
+              <a:rPr lang="en-GB" dirty="0" smtClean="0"/>
+              <a:t> </a:t>
             </a:r>
+          </a:p>
+          <a:p>
+            <a:pPr>
+              <a:lnSpc>
+                <a:spcPct val="200000"/>
+              </a:lnSpc>
+            </a:pPr>
             <a:r>
-              <a:rPr lang="en-GB" dirty="0"/>
-              <a:t> were used for development. </a:t>
+              <a:rPr lang="en-GB" dirty="0" smtClean="0"/>
+              <a:t>Flipkart</a:t>
             </a:r>
-            <a:r>
-              <a:rPr lang="en-GB" b="1" dirty="0"/>
-              <a:t>GST invoice guidelines</a:t>
-            </a:r>
-            <a:r>
-              <a:rPr lang="en-GB" dirty="0"/>
-              <a:t> ensured proper billing format. Open-source libraries like </a:t>
-            </a:r>
-            <a:r>
-              <a:rPr lang="en-GB" b="1" dirty="0" smtClean="0"/>
-              <a:t>Mongoose, </a:t>
-            </a:r>
-            <a:r>
-              <a:rPr lang="en-GB" b="1" dirty="0"/>
-              <a:t>JWT, and Swagger-UI</a:t>
-            </a:r>
-            <a:r>
-              <a:rPr lang="en-GB" dirty="0"/>
-              <a:t> were utilized for database management, validation, authentication, and API documentation. </a:t>
-            </a:r>
-            <a:r>
-              <a:rPr lang="en-GB" b="1" dirty="0"/>
-              <a:t>UI inspiration</a:t>
-            </a:r>
-            <a:r>
-              <a:rPr lang="en-GB" dirty="0"/>
-              <a:t> was taken from modern retail POS systems and e-commerce best practices.</a:t>
-            </a:r>
+          </a:p>
+          <a:p>
+            <a:pPr>
+              <a:lnSpc>
+                <a:spcPct val="200000"/>
+              </a:lnSpc>
+            </a:pPr>
+            <a:endParaRPr lang="en-GB" dirty="0"/>
           </a:p>
         </p:txBody>
       </p:sp>
@@ -23497,7 +24767,7 @@
 </p:sld>
 </file>
 
-<file path=ppt/slides/slide21.xml><?xml version="1.0" encoding="utf-8"?>
+<file path=ppt/slides/slide25.xml><?xml version="1.0" encoding="utf-8"?>
 <p:sld xmlns:a="http://schemas.openxmlformats.org/drawingml/2006/main" xmlns:r="http://schemas.openxmlformats.org/officeDocument/2006/relationships" xmlns:p="http://schemas.openxmlformats.org/presentationml/2006/main">
   <p:cSld>
     <p:bg>
